--- a/topic04-selection/unit-1/talk-3/c-selection.pptx
+++ b/topic04-selection/unit-1/talk-3/c-selection.pptx
@@ -4614,7 +4614,7 @@
           <a:p>
             <a:fld id="{C764DE79-268F-4C1A-8933-263129D2AF90}" type="datetimeFigureOut">
               <a:rPr lang="en-US" smtClean="0"/>
-              <a:t>10/5/25</a:t>
+              <a:t>10/16/25</a:t>
             </a:fld>
             <a:endParaRPr lang="en-US"/>
           </a:p>
@@ -4785,7 +4785,7 @@
           <a:p>
             <a:fld id="{C764DE79-268F-4C1A-8933-263129D2AF90}" type="datetimeFigureOut">
               <a:rPr lang="en-US" smtClean="0"/>
-              <a:t>10/5/25</a:t>
+              <a:t>10/16/25</a:t>
             </a:fld>
             <a:endParaRPr lang="en-US"/>
           </a:p>
@@ -4966,7 +4966,7 @@
           <a:p>
             <a:fld id="{C764DE79-268F-4C1A-8933-263129D2AF90}" type="datetimeFigureOut">
               <a:rPr lang="en-US" smtClean="0"/>
-              <a:t>10/5/25</a:t>
+              <a:t>10/16/25</a:t>
             </a:fld>
             <a:endParaRPr lang="en-US"/>
           </a:p>
@@ -5697,7 +5697,7 @@
           <a:p>
             <a:fld id="{C764DE79-268F-4C1A-8933-263129D2AF90}" type="datetimeFigureOut">
               <a:rPr lang="en-US" smtClean="0"/>
-              <a:t>10/5/25</a:t>
+              <a:t>10/16/25</a:t>
             </a:fld>
             <a:endParaRPr lang="en-US"/>
           </a:p>
@@ -6069,7 +6069,7 @@
           <a:p>
             <a:fld id="{C764DE79-268F-4C1A-8933-263129D2AF90}" type="datetimeFigureOut">
               <a:rPr lang="en-US" smtClean="0"/>
-              <a:t>10/5/25</a:t>
+              <a:t>10/16/25</a:t>
             </a:fld>
             <a:endParaRPr lang="en-US"/>
           </a:p>
@@ -6369,7 +6369,7 @@
           <a:p>
             <a:fld id="{C764DE79-268F-4C1A-8933-263129D2AF90}" type="datetimeFigureOut">
               <a:rPr lang="en-US" smtClean="0"/>
-              <a:t>10/5/25</a:t>
+              <a:t>10/16/25</a:t>
             </a:fld>
             <a:endParaRPr lang="en-US"/>
           </a:p>
@@ -6916,7 +6916,7 @@
           <a:p>
             <a:fld id="{C764DE79-268F-4C1A-8933-263129D2AF90}" type="datetimeFigureOut">
               <a:rPr lang="en-US" smtClean="0"/>
-              <a:t>10/5/25</a:t>
+              <a:t>10/16/25</a:t>
             </a:fld>
             <a:endParaRPr lang="en-US"/>
           </a:p>
@@ -7122,7 +7122,7 @@
           <a:p>
             <a:fld id="{C764DE79-268F-4C1A-8933-263129D2AF90}" type="datetimeFigureOut">
               <a:rPr lang="en-US" smtClean="0"/>
-              <a:t>10/5/25</a:t>
+              <a:t>10/16/25</a:t>
             </a:fld>
             <a:endParaRPr lang="en-US"/>
           </a:p>
@@ -7334,7 +7334,7 @@
           <a:p>
             <a:fld id="{C764DE79-268F-4C1A-8933-263129D2AF90}" type="datetimeFigureOut">
               <a:rPr lang="en-US" smtClean="0"/>
-              <a:t>10/5/25</a:t>
+              <a:t>10/16/25</a:t>
             </a:fld>
             <a:endParaRPr lang="en-US"/>
           </a:p>
@@ -7611,7 +7611,7 @@
           <a:p>
             <a:fld id="{C764DE79-268F-4C1A-8933-263129D2AF90}" type="datetimeFigureOut">
               <a:rPr lang="en-US" smtClean="0"/>
-              <a:t>10/5/25</a:t>
+              <a:t>10/16/25</a:t>
             </a:fld>
             <a:endParaRPr lang="en-US"/>
           </a:p>
@@ -7869,7 +7869,7 @@
           <a:p>
             <a:fld id="{C764DE79-268F-4C1A-8933-263129D2AF90}" type="datetimeFigureOut">
               <a:rPr lang="en-US" smtClean="0"/>
-              <a:t>10/5/25</a:t>
+              <a:t>10/16/25</a:t>
             </a:fld>
             <a:endParaRPr lang="en-US"/>
           </a:p>
@@ -8088,7 +8088,7 @@
           <a:p>
             <a:fld id="{C764DE79-268F-4C1A-8933-263129D2AF90}" type="datetimeFigureOut">
               <a:rPr lang="en-US" smtClean="0"/>
-              <a:t>10/5/25</a:t>
+              <a:t>10/16/25</a:t>
             </a:fld>
             <a:endParaRPr lang="en-US"/>
           </a:p>
@@ -8892,13 +8892,14 @@
             </a:lvl9pPr>
           </a:lstStyle>
           <a:p>
-            <a:pPr algn="r">
+            <a:pPr marL="0" indent="0" algn="r">
               <a:lnSpc>
                 <a:spcPct val="110000"/>
               </a:lnSpc>
               <a:spcBef>
                 <a:spcPts val="0"/>
               </a:spcBef>
+              <a:buNone/>
             </a:pPr>
             <a:r>
               <a:rPr lang="en-IE" sz="2400" dirty="0"/>
@@ -8906,13 +8907,14 @@
             </a:r>
           </a:p>
           <a:p>
-            <a:pPr algn="r">
+            <a:pPr marL="0" indent="0" algn="r">
               <a:lnSpc>
                 <a:spcPct val="110000"/>
               </a:lnSpc>
               <a:spcBef>
                 <a:spcPts val="0"/>
               </a:spcBef>
+              <a:buNone/>
             </a:pPr>
             <a:r>
               <a:rPr lang="en-IE" sz="2400" dirty="0"/>
@@ -8970,42 +8972,6 @@
           </a:p>
         </p:txBody>
       </p:sp>
-      <p:pic>
-        <p:nvPicPr>
-          <p:cNvPr id="4" name="Picture 3" descr="Text&#10;&#10;Description automatically generated">
-            <a:extLst>
-              <a:ext uri="{FF2B5EF4-FFF2-40B4-BE49-F238E27FC236}">
-                <a16:creationId xmlns:a16="http://schemas.microsoft.com/office/drawing/2014/main" id="{3C52B6A4-97C1-5BF3-8F44-19C73FB40166}"/>
-              </a:ext>
-            </a:extLst>
-          </p:cNvPr>
-          <p:cNvPicPr>
-            <a:picLocks noChangeAspect="1"/>
-          </p:cNvPicPr>
-          <p:nvPr/>
-        </p:nvPicPr>
-        <p:blipFill>
-          <a:blip r:embed="rId3" cstate="print">
-            <a:extLst>
-              <a:ext uri="{28A0092B-C50C-407E-A947-70E740481C1C}">
-                <a14:useLocalDpi xmlns:a14="http://schemas.microsoft.com/office/drawing/2010/main" val="0"/>
-              </a:ext>
-            </a:extLst>
-          </a:blip>
-          <a:stretch>
-            <a:fillRect/>
-          </a:stretch>
-        </p:blipFill>
-        <p:spPr>
-          <a:xfrm>
-            <a:off x="651641" y="5501441"/>
-            <a:ext cx="2286000" cy="1281546"/>
-          </a:xfrm>
-          <a:prstGeom prst="rect">
-            <a:avLst/>
-          </a:prstGeom>
-        </p:spPr>
-      </p:pic>
       <p:sp>
         <p:nvSpPr>
           <p:cNvPr id="5" name="TextBox 4">
@@ -9076,7 +9042,7 @@
           <p:nvPr/>
         </p:nvPicPr>
         <p:blipFill>
-          <a:blip r:embed="rId4">
+          <a:blip r:embed="rId3">
             <a:extLst>
               <a:ext uri="{28A0092B-C50C-407E-A947-70E740481C1C}">
                 <a14:useLocalDpi xmlns:a14="http://schemas.microsoft.com/office/drawing/2010/main" val="0"/>
@@ -9106,6 +9072,42 @@
               </a14:hiddenFill>
             </a:ext>
           </a:extLst>
+        </p:spPr>
+      </p:pic>
+      <p:pic>
+        <p:nvPicPr>
+          <p:cNvPr id="7" name="Picture 6">
+            <a:extLst>
+              <a:ext uri="{FF2B5EF4-FFF2-40B4-BE49-F238E27FC236}">
+                <a16:creationId xmlns:a16="http://schemas.microsoft.com/office/drawing/2014/main" id="{20815E68-27DB-E37C-5099-9BE358067DCF}"/>
+              </a:ext>
+            </a:extLst>
+          </p:cNvPr>
+          <p:cNvPicPr>
+            <a:picLocks noChangeAspect="1"/>
+          </p:cNvPicPr>
+          <p:nvPr/>
+        </p:nvPicPr>
+        <p:blipFill>
+          <a:blip r:embed="rId4" cstate="print">
+            <a:extLst>
+              <a:ext uri="{28A0092B-C50C-407E-A947-70E740481C1C}">
+                <a14:useLocalDpi xmlns:a14="http://schemas.microsoft.com/office/drawing/2010/main" val="0"/>
+              </a:ext>
+            </a:extLst>
+          </a:blip>
+          <a:stretch>
+            <a:fillRect/>
+          </a:stretch>
+        </p:blipFill>
+        <p:spPr>
+          <a:xfrm>
+            <a:off x="499242" y="5565517"/>
+            <a:ext cx="2057400" cy="1153391"/>
+          </a:xfrm>
+          <a:prstGeom prst="rect">
+            <a:avLst/>
+          </a:prstGeom>
         </p:spPr>
       </p:pic>
     </p:spTree>
